--- a/content/youtube/shorts/SHORT_LLM_02_rag_honne.pptx
+++ b/content/youtube/shorts/SHORT_LLM_02_rag_honne.pptx
@@ -1328,7 +1328,7 @@
         </p:nvSpPr>
         <p:spPr>
           <a:xfrm>
-            <a:off x="274320" y="2286000"/>
+            <a:off x="274320" y="1371600"/>
             <a:ext cx="3566160" cy="2286000"/>
           </a:xfrm>
           <a:prstGeom prst="rect">
@@ -1356,7 +1356,7 @@
                 <a:ea typeface="Hiragino Sans" pitchFamily="34" charset="-122"/>
                 <a:cs typeface="Hiragino Sans" pitchFamily="34" charset="-120"/>
               </a:rPr>
-              <a:t>RAGを導入した</a:t>
+              <a:t>RAG導入して</a:t>
             </a:r>
             <a:endParaRPr lang="en-US" sz="2400" dirty="0"/>
           </a:p>
@@ -1376,15 +1376,74 @@
                 <a:ea typeface="Hiragino Sans" pitchFamily="34" charset="-122"/>
                 <a:cs typeface="Hiragino Sans" pitchFamily="34" charset="-120"/>
               </a:rPr>
-              <a:t>会社に聞いてみた</a:t>
+              <a:t>半年後、</a:t>
             </a:r>
             <a:endParaRPr lang="en-US" sz="2400" dirty="0"/>
           </a:p>
-        </p:txBody>
-      </p:sp>
-      <p:sp>
-        <p:nvSpPr>
-          <p:cNvPr id="3" name="Shape 1"/>
+          <a:p>
+            <a:pPr algn="l" indent="0" marL="0">
+              <a:lnSpc>
+                <a:spcPct val="130000"/>
+              </a:lnSpc>
+              <a:buNone/>
+            </a:pPr>
+            <a:r>
+              <a:rPr lang="en-US" sz="2400" b="1" dirty="0">
+                <a:solidFill>
+                  <a:srgbClr val="FFFFFF"/>
+                </a:solidFill>
+                <a:latin typeface="Hiragino Sans" pitchFamily="34" charset="0"/>
+                <a:ea typeface="Hiragino Sans" pitchFamily="34" charset="-122"/>
+                <a:cs typeface="Hiragino Sans" pitchFamily="34" charset="-120"/>
+              </a:rPr>
+              <a:t>誰も使ってない</a:t>
+            </a:r>
+            <a:endParaRPr lang="en-US" sz="2400" dirty="0"/>
+          </a:p>
+        </p:txBody>
+      </p:sp>
+      <p:sp>
+        <p:nvSpPr>
+          <p:cNvPr id="3" name="Text 1"/>
+          <p:cNvSpPr/>
+          <p:nvPr/>
+        </p:nvSpPr>
+        <p:spPr>
+          <a:xfrm>
+            <a:off x="274320" y="4114800"/>
+            <a:ext cx="3566160" cy="914400"/>
+          </a:xfrm>
+          <a:prstGeom prst="rect">
+            <a:avLst/>
+          </a:prstGeom>
+          <a:noFill/>
+          <a:ln/>
+        </p:spPr>
+        <p:txBody>
+          <a:bodyPr wrap="square" rtlCol="0" anchor="t"/>
+          <a:lstStyle/>
+          <a:p>
+            <a:pPr algn="l" indent="0" marL="0">
+              <a:buNone/>
+            </a:pPr>
+            <a:r>
+              <a:rPr lang="en-US" sz="1200" dirty="0">
+                <a:solidFill>
+                  <a:srgbClr val="57534E"/>
+                </a:solidFill>
+                <a:latin typeface="Hiragino Sans" pitchFamily="34" charset="0"/>
+                <a:ea typeface="Hiragino Sans" pitchFamily="34" charset="-122"/>
+                <a:cs typeface="Hiragino Sans" pitchFamily="34" charset="-120"/>
+              </a:rPr>
+              <a:t>これ、あなたの会社でも起きてませんか？</a:t>
+            </a:r>
+            <a:endParaRPr lang="en-US" sz="1200" dirty="0"/>
+          </a:p>
+        </p:txBody>
+      </p:sp>
+      <p:sp>
+        <p:nvSpPr>
+          <p:cNvPr id="4" name="Shape 2"/>
           <p:cNvSpPr/>
           <p:nvPr/>
         </p:nvSpPr>
@@ -1404,7 +1463,7 @@
       </p:sp>
       <p:sp>
         <p:nvSpPr>
-          <p:cNvPr id="4" name="Text 2"/>
+          <p:cNvPr id="5" name="Text 3"/>
           <p:cNvSpPr/>
           <p:nvPr/>
         </p:nvSpPr>
@@ -1509,7 +1568,47 @@
                 <a:ea typeface="Hiragino Sans" pitchFamily="34" charset="-122"/>
                 <a:cs typeface="Hiragino Sans" pitchFamily="34" charset="-120"/>
               </a:rPr>
-              <a:t>期待していたこと</a:t>
+              <a:t>導入前：</a:t>
+            </a:r>
+            <a:endParaRPr lang="en-US" sz="2000" dirty="0"/>
+          </a:p>
+          <a:p>
+            <a:pPr algn="l" indent="0" marL="0">
+              <a:lnSpc>
+                <a:spcPct val="130000"/>
+              </a:lnSpc>
+              <a:buNone/>
+            </a:pPr>
+            <a:r>
+              <a:rPr lang="en-US" sz="2000" b="1" dirty="0">
+                <a:solidFill>
+                  <a:srgbClr val="FFFFFF"/>
+                </a:solidFill>
+                <a:latin typeface="Hiragino Sans" pitchFamily="34" charset="0"/>
+                <a:ea typeface="Hiragino Sans" pitchFamily="34" charset="-122"/>
+                <a:cs typeface="Hiragino Sans" pitchFamily="34" charset="-120"/>
+              </a:rPr>
+              <a:t>「社内の知識が</a:t>
+            </a:r>
+            <a:endParaRPr lang="en-US" sz="2000" dirty="0"/>
+          </a:p>
+          <a:p>
+            <a:pPr algn="l" indent="0" marL="0">
+              <a:lnSpc>
+                <a:spcPct val="130000"/>
+              </a:lnSpc>
+              <a:buNone/>
+            </a:pPr>
+            <a:r>
+              <a:rPr lang="en-US" sz="2000" b="1" dirty="0">
+                <a:solidFill>
+                  <a:srgbClr val="FFFFFF"/>
+                </a:solidFill>
+                <a:latin typeface="Hiragino Sans" pitchFamily="34" charset="0"/>
+                <a:ea typeface="Hiragino Sans" pitchFamily="34" charset="-122"/>
+                <a:cs typeface="Hiragino Sans" pitchFamily="34" charset="-120"/>
+              </a:rPr>
+              <a:t>一瞬で見つかる！」</a:t>
             </a:r>
             <a:endParaRPr lang="en-US" sz="2000" dirty="0"/>
           </a:p>
@@ -1523,8 +1622,8 @@
         </p:nvSpPr>
         <p:spPr>
           <a:xfrm>
-            <a:off x="274320" y="3657600"/>
-            <a:ext cx="3566160" cy="2286000"/>
+            <a:off x="274320" y="4114800"/>
+            <a:ext cx="3566160" cy="914400"/>
           </a:xfrm>
           <a:prstGeom prst="rect">
             <a:avLst/>
@@ -1536,67 +1635,21 @@
           <a:bodyPr wrap="square" rtlCol="0" anchor="t"/>
           <a:lstStyle/>
           <a:p>
-            <a:pPr marL="342900" indent="-342900">
-              <a:lnSpc>
-                <a:spcPct val="150000"/>
-              </a:lnSpc>
-              <a:buSzPct val="100000"/>
-              <a:buChar char="•"/>
+            <a:pPr algn="l" indent="0" marL="0">
+              <a:buNone/>
             </a:pPr>
             <a:r>
-              <a:rPr lang="en-US" sz="1400" dirty="0">
+              <a:rPr lang="en-US" sz="1200" dirty="0">
                 <a:solidFill>
-                  <a:srgbClr val="FAF8F5"/>
+                  <a:srgbClr val="57534E"/>
                 </a:solidFill>
                 <a:latin typeface="Hiragino Sans" pitchFamily="34" charset="0"/>
                 <a:ea typeface="Hiragino Sans" pitchFamily="34" charset="-122"/>
                 <a:cs typeface="Hiragino Sans" pitchFamily="34" charset="-120"/>
               </a:rPr>
-              <a:t>社内文書をAIが検索</a:t>
-            </a:r>
-            <a:endParaRPr lang="en-US" sz="1400" dirty="0"/>
-          </a:p>
-          <a:p>
-            <a:pPr marL="342900" indent="-342900">
-              <a:lnSpc>
-                <a:spcPct val="150000"/>
-              </a:lnSpc>
-              <a:buSzPct val="100000"/>
-              <a:buChar char="•"/>
-            </a:pPr>
-            <a:r>
-              <a:rPr lang="en-US" sz="1400" dirty="0">
-                <a:solidFill>
-                  <a:srgbClr val="FAF8F5"/>
-                </a:solidFill>
-                <a:latin typeface="Hiragino Sans" pitchFamily="34" charset="0"/>
-                <a:ea typeface="Hiragino Sans" pitchFamily="34" charset="-122"/>
-                <a:cs typeface="Hiragino Sans" pitchFamily="34" charset="-120"/>
-              </a:rPr>
-              <a:t>質問すれば的確な答え</a:t>
-            </a:r>
-            <a:endParaRPr lang="en-US" sz="1400" dirty="0"/>
-          </a:p>
-          <a:p>
-            <a:pPr marL="342900" indent="-342900">
-              <a:lnSpc>
-                <a:spcPct val="150000"/>
-              </a:lnSpc>
-              <a:buSzPct val="100000"/>
-              <a:buChar char="•"/>
-            </a:pPr>
-            <a:r>
-              <a:rPr lang="en-US" sz="1400" dirty="0">
-                <a:solidFill>
-                  <a:srgbClr val="FAF8F5"/>
-                </a:solidFill>
-                <a:latin typeface="Hiragino Sans" pitchFamily="34" charset="0"/>
-                <a:ea typeface="Hiragino Sans" pitchFamily="34" charset="-122"/>
-                <a:cs typeface="Hiragino Sans" pitchFamily="34" charset="-120"/>
-              </a:rPr>
-              <a:t>ナレッジが全社共有</a:t>
-            </a:r>
-            <a:endParaRPr lang="en-US" sz="1400" dirty="0"/>
+              <a:t>経営会議で拍手が起きた</a:t>
+            </a:r>
+            <a:endParaRPr lang="en-US" sz="1200" dirty="0"/>
           </a:p>
         </p:txBody>
       </p:sp>
@@ -1727,7 +1780,47 @@
                 <a:ea typeface="Hiragino Sans" pitchFamily="34" charset="-122"/>
                 <a:cs typeface="Hiragino Sans" pitchFamily="34" charset="-120"/>
               </a:rPr>
-              <a:t>実際に起きたこと</a:t>
+              <a:t>半年後：</a:t>
+            </a:r>
+            <a:endParaRPr lang="en-US" sz="2000" dirty="0"/>
+          </a:p>
+          <a:p>
+            <a:pPr algn="l" indent="0" marL="0">
+              <a:lnSpc>
+                <a:spcPct val="130000"/>
+              </a:lnSpc>
+              <a:buNone/>
+            </a:pPr>
+            <a:r>
+              <a:rPr lang="en-US" sz="2000" b="1" dirty="0">
+                <a:solidFill>
+                  <a:srgbClr val="FFFFFF"/>
+                </a:solidFill>
+                <a:latin typeface="Hiragino Sans" pitchFamily="34" charset="0"/>
+                <a:ea typeface="Hiragino Sans" pitchFamily="34" charset="-122"/>
+                <a:cs typeface="Hiragino Sans" pitchFamily="34" charset="-120"/>
+              </a:rPr>
+              <a:t>「Google検索の方が</a:t>
+            </a:r>
+            <a:endParaRPr lang="en-US" sz="2000" dirty="0"/>
+          </a:p>
+          <a:p>
+            <a:pPr algn="l" indent="0" marL="0">
+              <a:lnSpc>
+                <a:spcPct val="130000"/>
+              </a:lnSpc>
+              <a:buNone/>
+            </a:pPr>
+            <a:r>
+              <a:rPr lang="en-US" sz="2000" b="1" dirty="0">
+                <a:solidFill>
+                  <a:srgbClr val="FFFFFF"/>
+                </a:solidFill>
+                <a:latin typeface="Hiragino Sans" pitchFamily="34" charset="0"/>
+                <a:ea typeface="Hiragino Sans" pitchFamily="34" charset="-122"/>
+                <a:cs typeface="Hiragino Sans" pitchFamily="34" charset="-120"/>
+              </a:rPr>
+              <a:t>マシだった」</a:t>
             </a:r>
             <a:endParaRPr lang="en-US" sz="2000" dirty="0"/>
           </a:p>
@@ -1741,8 +1834,8 @@
         </p:nvSpPr>
         <p:spPr>
           <a:xfrm>
-            <a:off x="274320" y="3657600"/>
-            <a:ext cx="3566160" cy="2286000"/>
+            <a:off x="274320" y="4114800"/>
+            <a:ext cx="3566160" cy="914400"/>
           </a:xfrm>
           <a:prstGeom prst="rect">
             <a:avLst/>
@@ -1754,88 +1847,21 @@
           <a:bodyPr wrap="square" rtlCol="0" anchor="t"/>
           <a:lstStyle/>
           <a:p>
-            <a:pPr marL="342900" indent="-342900">
-              <a:lnSpc>
-                <a:spcPct val="150000"/>
-              </a:lnSpc>
-              <a:buSzPct val="100000"/>
-              <a:buChar char="•"/>
+            <a:pPr algn="l" indent="0" marL="0">
+              <a:buNone/>
             </a:pPr>
             <a:r>
-              <a:rPr lang="en-US" sz="1400" dirty="0">
+              <a:rPr lang="en-US" sz="1200" dirty="0">
                 <a:solidFill>
-                  <a:srgbClr val="FAF8F5"/>
+                  <a:srgbClr val="57534E"/>
                 </a:solidFill>
                 <a:latin typeface="Hiragino Sans" pitchFamily="34" charset="0"/>
                 <a:ea typeface="Hiragino Sans" pitchFamily="34" charset="-122"/>
                 <a:cs typeface="Hiragino Sans" pitchFamily="34" charset="-120"/>
               </a:rPr>
-              <a:t>検索精度が低い</a:t>
-            </a:r>
-            <a:endParaRPr lang="en-US" sz="1400" dirty="0"/>
-          </a:p>
-          <a:p>
-            <a:pPr marL="342900" indent="-342900">
-              <a:lnSpc>
-                <a:spcPct val="150000"/>
-              </a:lnSpc>
-              <a:buSzPct val="100000"/>
-              <a:buChar char="•"/>
-            </a:pPr>
-            <a:r>
-              <a:rPr lang="en-US" sz="1400" dirty="0">
-                <a:solidFill>
-                  <a:srgbClr val="FAF8F5"/>
-                </a:solidFill>
-                <a:latin typeface="Hiragino Sans" pitchFamily="34" charset="0"/>
-                <a:ea typeface="Hiragino Sans" pitchFamily="34" charset="-122"/>
-                <a:cs typeface="Hiragino Sans" pitchFamily="34" charset="-120"/>
-              </a:rPr>
-              <a:t>回答が的外れ</a:t>
-            </a:r>
-            <a:endParaRPr lang="en-US" sz="1400" dirty="0"/>
-          </a:p>
-          <a:p>
-            <a:pPr marL="342900" indent="-342900">
-              <a:lnSpc>
-                <a:spcPct val="150000"/>
-              </a:lnSpc>
-              <a:buSzPct val="100000"/>
-              <a:buChar char="•"/>
-            </a:pPr>
-            <a:r>
-              <a:rPr lang="en-US" sz="1400" dirty="0">
-                <a:solidFill>
-                  <a:srgbClr val="FAF8F5"/>
-                </a:solidFill>
-                <a:latin typeface="Hiragino Sans" pitchFamily="34" charset="0"/>
-                <a:ea typeface="Hiragino Sans" pitchFamily="34" charset="-122"/>
-                <a:cs typeface="Hiragino Sans" pitchFamily="34" charset="-120"/>
-              </a:rPr>
-              <a:t>結局、人が確認</a:t>
-            </a:r>
-            <a:endParaRPr lang="en-US" sz="1400" dirty="0"/>
-          </a:p>
-          <a:p>
-            <a:pPr marL="342900" indent="-342900">
-              <a:lnSpc>
-                <a:spcPct val="150000"/>
-              </a:lnSpc>
-              <a:buSzPct val="100000"/>
-              <a:buChar char="•"/>
-            </a:pPr>
-            <a:r>
-              <a:rPr lang="en-US" sz="1400" dirty="0">
-                <a:solidFill>
-                  <a:srgbClr val="FAF8F5"/>
-                </a:solidFill>
-                <a:latin typeface="Hiragino Sans" pitchFamily="34" charset="0"/>
-                <a:ea typeface="Hiragino Sans" pitchFamily="34" charset="-122"/>
-                <a:cs typeface="Hiragino Sans" pitchFamily="34" charset="-120"/>
-              </a:rPr>
-              <a:t>「Google検索の方がマシ」</a:t>
-            </a:r>
-            <a:endParaRPr lang="en-US" sz="1400" dirty="0"/>
+              <a:t>現場の本音がこれ</a:t>
+            </a:r>
+            <a:endParaRPr lang="en-US" sz="1200" dirty="0"/>
           </a:p>
         </p:txBody>
       </p:sp>
@@ -1938,7 +1964,7 @@
         </p:nvSpPr>
         <p:spPr>
           <a:xfrm>
-            <a:off x="274320" y="1371600"/>
+            <a:off x="274320" y="2286000"/>
             <a:ext cx="3566160" cy="2286000"/>
           </a:xfrm>
           <a:prstGeom prst="rect">
@@ -1958,7 +1984,7 @@
               <a:buNone/>
             </a:pPr>
             <a:r>
-              <a:rPr lang="en-US" sz="2000" b="1" dirty="0">
+              <a:rPr lang="en-US" sz="2800" b="1" dirty="0">
                 <a:solidFill>
                   <a:srgbClr val="FFFFFF"/>
                 </a:solidFill>
@@ -1966,9 +1992,9 @@
                 <a:ea typeface="Hiragino Sans" pitchFamily="34" charset="-122"/>
                 <a:cs typeface="Hiragino Sans" pitchFamily="34" charset="-120"/>
               </a:rPr>
-              <a:t>なぜRAGは</a:t>
-            </a:r>
-            <a:endParaRPr lang="en-US" sz="2000" dirty="0"/>
+              <a:t>RAGは悪くない。</a:t>
+            </a:r>
+            <a:endParaRPr lang="en-US" sz="2800" dirty="0"/>
           </a:p>
           <a:p>
             <a:pPr algn="l" indent="0" marL="0">
@@ -1978,7 +2004,7 @@
               <a:buNone/>
             </a:pPr>
             <a:r>
-              <a:rPr lang="en-US" sz="2000" b="1" dirty="0">
+              <a:rPr lang="en-US" sz="2800" b="1" dirty="0">
                 <a:solidFill>
                   <a:srgbClr val="FFFFFF"/>
                 </a:solidFill>
@@ -1986,71 +2012,35 @@
                 <a:ea typeface="Hiragino Sans" pitchFamily="34" charset="-122"/>
                 <a:cs typeface="Hiragino Sans" pitchFamily="34" charset="-120"/>
               </a:rPr>
-              <a:t>期待を裏切るのか</a:t>
-            </a:r>
-            <a:endParaRPr lang="en-US" sz="2000" dirty="0"/>
-          </a:p>
-        </p:txBody>
-      </p:sp>
-      <p:sp>
-        <p:nvSpPr>
-          <p:cNvPr id="3" name="Text 1"/>
-          <p:cNvSpPr/>
-          <p:nvPr/>
-        </p:nvSpPr>
-        <p:spPr>
-          <a:xfrm>
-            <a:off x="274320" y="4114800"/>
-            <a:ext cx="3566160" cy="914400"/>
-          </a:xfrm>
-          <a:prstGeom prst="rect">
-            <a:avLst/>
-          </a:prstGeom>
-          <a:noFill/>
-          <a:ln/>
-        </p:spPr>
-        <p:txBody>
-          <a:bodyPr wrap="square" rtlCol="0" anchor="t"/>
-          <a:lstStyle/>
+              <a:t>食わせたデータが</a:t>
+            </a:r>
+            <a:endParaRPr lang="en-US" sz="2800" dirty="0"/>
+          </a:p>
           <a:p>
             <a:pPr algn="l" indent="0" marL="0">
+              <a:lnSpc>
+                <a:spcPct val="130000"/>
+              </a:lnSpc>
               <a:buNone/>
             </a:pPr>
             <a:r>
-              <a:rPr lang="en-US" sz="1200" dirty="0">
+              <a:rPr lang="en-US" sz="2800" b="1" dirty="0">
                 <a:solidFill>
-                  <a:srgbClr val="57534E"/>
+                  <a:srgbClr val="FFFFFF"/>
                 </a:solidFill>
                 <a:latin typeface="Hiragino Sans" pitchFamily="34" charset="0"/>
                 <a:ea typeface="Hiragino Sans" pitchFamily="34" charset="-122"/>
                 <a:cs typeface="Hiragino Sans" pitchFamily="34" charset="-120"/>
               </a:rPr>
-              <a:t>元データが整理されていないから</a:t>
-            </a:r>
-            <a:endParaRPr lang="en-US" sz="1200" dirty="0"/>
-          </a:p>
-          <a:p>
-            <a:pPr algn="l" indent="0" marL="0">
-              <a:buNone/>
-            </a:pPr>
-            <a:r>
-              <a:rPr lang="en-US" sz="1200" dirty="0">
-                <a:solidFill>
-                  <a:srgbClr val="57534E"/>
-                </a:solidFill>
-                <a:latin typeface="Hiragino Sans" pitchFamily="34" charset="0"/>
-                <a:ea typeface="Hiragino Sans" pitchFamily="34" charset="-122"/>
-                <a:cs typeface="Hiragino Sans" pitchFamily="34" charset="-120"/>
-              </a:rPr>
-              <a:t>ゴミを入れればゴミが出る</a:t>
-            </a:r>
-            <a:endParaRPr lang="en-US" sz="1200" dirty="0"/>
-          </a:p>
-        </p:txBody>
-      </p:sp>
-      <p:sp>
-        <p:nvSpPr>
-          <p:cNvPr id="4" name="Shape 2"/>
+              <a:t>ゴミだっただけ。</a:t>
+            </a:r>
+            <a:endParaRPr lang="en-US" sz="2800" dirty="0"/>
+          </a:p>
+        </p:txBody>
+      </p:sp>
+      <p:sp>
+        <p:nvSpPr>
+          <p:cNvPr id="3" name="Shape 1"/>
           <p:cNvSpPr/>
           <p:nvPr/>
         </p:nvSpPr>
@@ -2070,7 +2060,7 @@
       </p:sp>
       <p:sp>
         <p:nvSpPr>
-          <p:cNvPr id="5" name="Text 3"/>
+          <p:cNvPr id="4" name="Text 2"/>
           <p:cNvSpPr/>
           <p:nvPr/>
         </p:nvSpPr>
@@ -2147,7 +2137,7 @@
         </p:nvSpPr>
         <p:spPr>
           <a:xfrm>
-            <a:off x="274320" y="1371600"/>
+            <a:off x="274320" y="2286000"/>
             <a:ext cx="3566160" cy="2286000"/>
           </a:xfrm>
           <a:prstGeom prst="rect">
@@ -2175,7 +2165,7 @@
                 <a:ea typeface="Hiragino Sans" pitchFamily="34" charset="-122"/>
                 <a:cs typeface="Hiragino Sans" pitchFamily="34" charset="-120"/>
               </a:rPr>
-              <a:t>RAGの問題は</a:t>
+              <a:t>整理されてない</a:t>
             </a:r>
             <a:endParaRPr lang="en-US" sz="2800" dirty="0"/>
           </a:p>
@@ -2195,7 +2185,7 @@
                 <a:ea typeface="Hiragino Sans" pitchFamily="34" charset="-122"/>
                 <a:cs typeface="Hiragino Sans" pitchFamily="34" charset="-120"/>
               </a:rPr>
-              <a:t>AIではない。</a:t>
+              <a:t>データに</a:t>
             </a:r>
             <a:endParaRPr lang="en-US" sz="2800" dirty="0"/>
           </a:p>
@@ -2215,54 +2205,55 @@
                 <a:ea typeface="Hiragino Sans" pitchFamily="34" charset="-122"/>
                 <a:cs typeface="Hiragino Sans" pitchFamily="34" charset="-120"/>
               </a:rPr>
-              <a:t>データの問題。</a:t>
+              <a:t>AIをかぶせても、</a:t>
             </a:r>
             <a:endParaRPr lang="en-US" sz="2800" dirty="0"/>
           </a:p>
-        </p:txBody>
-      </p:sp>
-      <p:sp>
-        <p:nvSpPr>
-          <p:cNvPr id="3" name="Text 1"/>
-          <p:cNvSpPr/>
-          <p:nvPr/>
-        </p:nvSpPr>
-        <p:spPr>
-          <a:xfrm>
-            <a:off x="274320" y="4114800"/>
-            <a:ext cx="3566160" cy="914400"/>
-          </a:xfrm>
-          <a:prstGeom prst="rect">
-            <a:avLst/>
-          </a:prstGeom>
-          <a:noFill/>
-          <a:ln/>
-        </p:spPr>
-        <p:txBody>
-          <a:bodyPr wrap="square" rtlCol="0" anchor="t"/>
-          <a:lstStyle/>
           <a:p>
             <a:pPr algn="l" indent="0" marL="0">
+              <a:lnSpc>
+                <a:spcPct val="130000"/>
+              </a:lnSpc>
               <a:buNone/>
             </a:pPr>
             <a:r>
-              <a:rPr lang="en-US" sz="1200" dirty="0">
+              <a:rPr lang="en-US" sz="2800" b="1" dirty="0">
                 <a:solidFill>
-                  <a:srgbClr val="57534E"/>
+                  <a:srgbClr val="FFFFFF"/>
                 </a:solidFill>
                 <a:latin typeface="Hiragino Sans" pitchFamily="34" charset="0"/>
                 <a:ea typeface="Hiragino Sans" pitchFamily="34" charset="-122"/>
                 <a:cs typeface="Hiragino Sans" pitchFamily="34" charset="-120"/>
               </a:rPr>
-              <a:t>検索だけでは業務は変わらない</a:t>
-            </a:r>
-            <a:endParaRPr lang="en-US" sz="1200" dirty="0"/>
-          </a:p>
-        </p:txBody>
-      </p:sp>
-      <p:sp>
-        <p:nvSpPr>
-          <p:cNvPr id="4" name="Shape 2"/>
+              <a:t>高速でゴミが出る</a:t>
+            </a:r>
+            <a:endParaRPr lang="en-US" sz="2800" dirty="0"/>
+          </a:p>
+          <a:p>
+            <a:pPr algn="l" indent="0" marL="0">
+              <a:lnSpc>
+                <a:spcPct val="130000"/>
+              </a:lnSpc>
+              <a:buNone/>
+            </a:pPr>
+            <a:r>
+              <a:rPr lang="en-US" sz="2800" b="1" dirty="0">
+                <a:solidFill>
+                  <a:srgbClr val="FFFFFF"/>
+                </a:solidFill>
+                <a:latin typeface="Hiragino Sans" pitchFamily="34" charset="0"/>
+                <a:ea typeface="Hiragino Sans" pitchFamily="34" charset="-122"/>
+                <a:cs typeface="Hiragino Sans" pitchFamily="34" charset="-120"/>
+              </a:rPr>
+              <a:t>だけ</a:t>
+            </a:r>
+            <a:endParaRPr lang="en-US" sz="2800" dirty="0"/>
+          </a:p>
+        </p:txBody>
+      </p:sp>
+      <p:sp>
+        <p:nvSpPr>
+          <p:cNvPr id="3" name="Shape 1"/>
           <p:cNvSpPr/>
           <p:nvPr/>
         </p:nvSpPr>
@@ -2282,7 +2273,7 @@
       </p:sp>
       <p:sp>
         <p:nvSpPr>
-          <p:cNvPr id="5" name="Text 3"/>
+          <p:cNvPr id="4" name="Text 2"/>
           <p:cNvSpPr/>
           <p:nvPr/>
         </p:nvSpPr>
@@ -2387,7 +2378,7 @@
                 <a:ea typeface="Hiragino Sans" pitchFamily="34" charset="-122"/>
                 <a:cs typeface="Hiragino Sans" pitchFamily="34" charset="-120"/>
               </a:rPr>
-              <a:t>次回：</a:t>
+              <a:t>AIの前に、</a:t>
             </a:r>
             <a:endParaRPr lang="en-US" sz="2000" dirty="0"/>
           </a:p>
@@ -2407,27 +2398,7 @@
                 <a:ea typeface="Hiragino Sans" pitchFamily="34" charset="-122"/>
                 <a:cs typeface="Hiragino Sans" pitchFamily="34" charset="-120"/>
               </a:rPr>
-              <a:t>日本語LLM開発に</a:t>
-            </a:r>
-            <a:endParaRPr lang="en-US" sz="2000" dirty="0"/>
-          </a:p>
-          <a:p>
-            <a:pPr algn="l" indent="0" marL="0">
-              <a:lnSpc>
-                <a:spcPct val="130000"/>
-              </a:lnSpc>
-              <a:buNone/>
-            </a:pPr>
-            <a:r>
-              <a:rPr lang="en-US" sz="2000" b="1" dirty="0">
-                <a:solidFill>
-                  <a:srgbClr val="FFFFFF"/>
-                </a:solidFill>
-                <a:latin typeface="Hiragino Sans" pitchFamily="34" charset="0"/>
-                <a:ea typeface="Hiragino Sans" pitchFamily="34" charset="-122"/>
-                <a:cs typeface="Hiragino Sans" pitchFamily="34" charset="-120"/>
-              </a:rPr>
-              <a:t>意味はあるか</a:t>
+              <a:t>データを整理しろ</a:t>
             </a:r>
             <a:endParaRPr lang="en-US" sz="2000" dirty="0"/>
           </a:p>
@@ -2453,23 +2424,6 @@
         <p:txBody>
           <a:bodyPr wrap="square" rtlCol="0" anchor="t"/>
           <a:lstStyle/>
-          <a:p>
-            <a:pPr algn="l" indent="0" marL="0">
-              <a:buNone/>
-            </a:pPr>
-            <a:r>
-              <a:rPr lang="en-US" sz="1200" dirty="0">
-                <a:solidFill>
-                  <a:srgbClr val="57534E"/>
-                </a:solidFill>
-                <a:latin typeface="Hiragino Sans" pitchFamily="34" charset="0"/>
-                <a:ea typeface="Hiragino Sans" pitchFamily="34" charset="-122"/>
-                <a:cs typeface="Hiragino Sans" pitchFamily="34" charset="-120"/>
-              </a:rPr>
-              <a:t>この動画はPowerPointからInsight Training Studioで自動生成しています</a:t>
-            </a:r>
-            <a:endParaRPr lang="en-US" sz="1200" dirty="0"/>
-          </a:p>
           <a:p>
             <a:pPr algn="l" indent="0" marL="0">
               <a:buNone/>
